--- a/decks/hist-vikings-saxons/hist-vikings-saxons_ch4_lindisfarne.pptx
+++ b/decks/hist-vikings-saxons/hist-vikings-saxons_ch4_lindisfarne.pptx
@@ -127,30 +127,30 @@
   <p:extLst>
     <p:ext uri="{521415D9-36F7-43E2-AB2F-B90AF26B5E84}">
       <p14:sectionLst xmlns:p14="http://schemas.microsoft.com/office/powerpoint/2010/main">
-        <p14:section name="Opening" id="{c6e5721e-4b75-62f4-f71c-6c1fb1568af4}">
+        <p14:section name="Opening" id="{5d488b10-d11a-cbc3-b051-d2f8fffa8c65}">
           <p14:sldIdLst>
             <p14:sldId id="256"/>
           </p14:sldIdLst>
         </p14:section>
-        <p14:section name="Gate" id="{2589d60e-248d-70d5-73fa-96bb0e1396c0}">
+        <p14:section name="Gate" id="{77c8d048-04b5-a3ee-47d7-5c3015ec98fb}">
           <p14:sldIdLst>
             <p14:sldId id="257"/>
             <p14:sldId id="258"/>
           </p14:sldIdLst>
         </p14:section>
-        <p14:section name="Pre-teach" id="{016d1566-ce38-f30b-ee7b-ad76971f240d}">
+        <p14:section name="Pre-teach" id="{102b038c-00e6-9b7d-be41-37e7cc39633c}">
           <p14:sldIdLst>
             <p14:sldId id="259"/>
             <p14:sldId id="260"/>
           </p14:sldIdLst>
         </p14:section>
-        <p14:section name="Read-along" id="{06a14c76-5627-9b3c-9eb1-5126de74ffbb}">
+        <p14:section name="Read-along" id="{c4f358f3-7b08-b361-73bd-2d0a3424ecbf}">
           <p14:sldIdLst>
             <p14:sldId id="261"/>
             <p14:sldId id="262"/>
           </p14:sldIdLst>
         </p14:section>
-        <p14:section name="Teach" id="{e26df7b2-085c-aeb1-072a-8f8e90e6352e}">
+        <p14:section name="Teach" id="{8bc35500-0b33-09c4-e89e-4a810cdba466}">
           <p14:sldIdLst>
             <p14:sldId id="263"/>
             <p14:sldId id="264"/>
@@ -159,7 +159,7 @@
             <p14:sldId id="267"/>
           </p14:sldIdLst>
         </p14:section>
-        <p14:section name="Routes" id="{049d320e-628d-c700-ad94-27390f1e3ef4}">
+        <p14:section name="Routes" id="{fd65f221-6ce6-78aa-ff7a-03fcc36b4b20}">
           <p14:sldIdLst>
             <p14:sldId id="268"/>
             <p14:sldId id="269"/>
@@ -168,12 +168,12 @@
             <p14:sldId id="272"/>
           </p14:sldIdLst>
         </p14:section>
-        <p14:section name="Close" id="{d9d8d03d-e5f1-2aee-2d4d-f3360c0c2586}">
+        <p14:section name="Close" id="{c51b19e0-3589-0a0f-cd2b-be5b93a302f6}">
           <p14:sldIdLst>
             <p14:sldId id="273"/>
           </p14:sldIdLst>
         </p14:section>
-        <p14:section name="Answers" id="{4c236a39-514d-e4b2-b738-08585040577a}">
+        <p14:section name="Answers" id="{c76ce2f0-185c-4753-0edb-03f0d50901cb}">
           <p14:sldIdLst>
             <p14:sldId id="274"/>
             <p14:sldId id="275"/>
@@ -2356,7 +2356,7 @@
             <a:r>
               <a:rPr lang="en-US" dirty="0"/>
               <a:t>Teach — Why would anyone attack this island?. Say it in your own words, then check understanding with a quick question: ask a pupil from the pre-teach group first, since they met these words and ideas before the lesson. Pupils try to recall before you re-explain.
-Lindisfarne is a small island off the north-east coast of England. It is also called Holy Island, because it had a very important Christian monastery. Monks lived there, prayed, and made books about their religion. You can only reach the island when the tide is low, so it felt like a peaceful and safe place.
+Lindisfarne is a small island off the north-east coast of England. Its other name is Holy Island, and it earned that name: the monastery standing on it was one of the most important Christian places in the country. The monks who lived there spent their days praying and copying out holy books by hand. The island can be walked to only at low tide, which is part of why it felt so safe.
 In the year 793, Viking warriors from Scandinavia sailed across the sea in their longships and attacked Lindisfarne. The monks did not fight back. The Vikings wanted the treasure and valuables of the monastery, and they took them. It was one of the first Viking raids on England, and historians often call it the beginning of the Viking Age.
 Why a monastery? Think like a raider. A monastery held gold and silver for its church, it was full of men who had given up fighting, and it stood by the sea where a longship could land and leave quickly. To a Viking it was rich, undefended and easy to reach.
 Tip: Three reasons a monastery was a target: rich, undefended, by the sea. You will need them for inference questions.</a:t>
